--- a/decks/hist-holocaust/hist-holocaust_ch6_responsibility-sources.pptx
+++ b/decks/hist-holocaust/hist-holocaust_ch6_responsibility-sources.pptx
@@ -127,30 +127,30 @@
   <p:extLst>
     <p:ext uri="{521415D9-36F7-43E2-AB2F-B90AF26B5E84}">
       <p14:sectionLst xmlns:p14="http://schemas.microsoft.com/office/powerpoint/2010/main">
-        <p14:section name="Opening" id="{45eaa92c-0a30-a721-959d-5c704380a9ad}">
+        <p14:section name="Opening" id="{03a1cb88-2c71-e353-e9b7-b017cd94b2c8}">
           <p14:sldIdLst>
             <p14:sldId id="256"/>
           </p14:sldIdLst>
         </p14:section>
-        <p14:section name="Gate" id="{9b48d2eb-5493-3d5d-f483-cd6737d3c252}">
+        <p14:section name="Gate" id="{c845c70b-86d5-ffa4-b51a-a8083bedb2da}">
           <p14:sldIdLst>
             <p14:sldId id="257"/>
             <p14:sldId id="258"/>
             <p14:sldId id="259"/>
           </p14:sldIdLst>
         </p14:section>
-        <p14:section name="Pre-teach" id="{b0520347-500b-86db-7b4c-6dc7aebe276a}">
+        <p14:section name="Pre-teach" id="{3064c122-b26d-dec8-9c5f-f4ab7fa42f8e}">
           <p14:sldIdLst>
             <p14:sldId id="260"/>
           </p14:sldIdLst>
         </p14:section>
-        <p14:section name="Read-along" id="{303cf8dd-711a-5a70-1d38-f3c0a5ac5997}">
+        <p14:section name="Read-along" id="{be8e3616-18e3-e3e5-5067-6517da3b5518}">
           <p14:sldIdLst>
             <p14:sldId id="261"/>
             <p14:sldId id="262"/>
           </p14:sldIdLst>
         </p14:section>
-        <p14:section name="Teach" id="{50b322d0-2d3f-9e77-fe21-8c4ff163c5bb}">
+        <p14:section name="Teach" id="{b0f7b8d4-c8f5-dc10-d200-56928ceb4687}">
           <p14:sldIdLst>
             <p14:sldId id="263"/>
             <p14:sldId id="264"/>
@@ -158,7 +158,7 @@
             <p14:sldId id="266"/>
           </p14:sldIdLst>
         </p14:section>
-        <p14:section name="Routes" id="{bfc5e4cb-a594-bc94-1c90-a570f3177e3a}">
+        <p14:section name="Routes" id="{1c848fca-4821-2ab5-8ae2-824678e8eaac}">
           <p14:sldIdLst>
             <p14:sldId id="267"/>
             <p14:sldId id="268"/>
@@ -167,12 +167,12 @@
             <p14:sldId id="271"/>
           </p14:sldIdLst>
         </p14:section>
-        <p14:section name="Close" id="{ee87e124-f119-2815-9889-266587e870c2}">
+        <p14:section name="Close" id="{8f42dfec-d899-cf0a-afcd-136a894a6763}">
           <p14:sldIdLst>
             <p14:sldId id="272"/>
           </p14:sldIdLst>
         </p14:section>
-        <p14:section name="Answers" id="{2170dbe0-52dc-ce2e-6dba-72e32356e7a6}">
+        <p14:section name="Answers" id="{9750a5e0-901e-3fe7-3e28-82339b4cf987}">
           <p14:sldIdLst>
             <p14:sldId id="273"/>
             <p14:sldId id="274"/>
